--- a/slides/talk-planner/talk-planner.pptx
+++ b/slides/talk-planner/talk-planner.pptx
@@ -541,7 +541,7 @@
           <a:lstStyle/>
           <a:p>
             <a:r>
-              <a:t>이 발표는 Planner 리서치 문서 한 챕터를 이야기로 묶은 것입니다. 결론부터 말하면, 2025–2026의 학습 Planner는 거의 모두 "생성기가 후보 여럿을 내고 다른 무엇이 고른다"로 모였고, travplan Planner D도 같은 꼴입니다. 갈리는 곳은 그 "다른 무엇"입니다. 마지막에는 travplan에서 실제로 잰 결과와 다음 시도 순서를 봅니다.</a:t>
+              <a:t>이 발표는 Planner 리서치 문서의 한 챕터를 하나의 이야기로 엮은 것입니다. 결론부터 말하면, 2025–2026의 학습 Planner는 거의 모두 "생성기가 후보 여럿을 내고 다른 무엇이 고른다"로 모였고, travplan Planner D도 같은 구조입니다. 갈리는 곳은 그 "다른 무엇"입니다. 마지막에는 travplan에서 실제로 잰 결과와 다음 시도 순서를 살펴봅니다.</a:t>
             </a:r>
           </a:p>
         </p:txBody>
@@ -611,7 +611,7 @@
           <a:lstStyle/>
           <a:p>
             <a:r>
-              <a:t>회귀 Planner는 대개 시간 없는 waypoint 열을 하나 내고, 생성형은 여러 개의 시간 인덱스 궤적을 내고 고릅니다. 다만 시간이 붙느냐는 생성형이냐가 아니라 출력 표현을 어떻게 약속했느냐의 문제입니다. GoalFlow는 NAVSIM에서 PDMS 90.3을 냈고, 잡음 제거 한 스텝으로도 성능이 좋았습니다. 차이는 GoalFlow가 목표점을 어휘에서 점수로 고르는 데 비해 Planner D는 고정 규칙으로 정한다는 것입니다.</a:t>
+              <a:t>회귀 Planner는 대개 시간 정보가 없는 waypoint 시퀀스를 하나 내고, 생성형은 시간 인덱스 궤적을 여러 개 내고 고릅니다. 다만 시간이 붙느냐는 생성형이냐의 문제가 아니라 출력 표현을 어떻게 정했느냐의 문제입니다. GoalFlow는 NAVSIM에서 PDMS 90.3을 냈고, denoising 한 스텝으로도 성능이 좋았습니다. 차이는 GoalFlow가 목표점을 vocabulary에서 점수로 고르는 데 비해 Planner D는 고정 규칙으로 정한다는 것입니다.</a:t>
             </a:r>
           </a:p>
         </p:txBody>
@@ -681,7 +681,7 @@
           <a:lstStyle/>
           <a:p>
             <a:r>
-              <a:t>출발점은 TIER IV의 Autoware Diffusion Planner입니다. DiT 3블록, hidden 192, DPM-Solver++ 10스텝으로 A6000에서 0.05초입니다. 가장 큰 차이는 기구학입니다. Diffusion Planner는 네트워크가 실행 가능성을 보장하지 않고 LQR에 맡기지만, Planner D는 제어 변화율을 생성해 스워브 모델로 굴리므로 후처리가 필요 없습니다. 이웃과의 공동 생성은 Planner D의 2단계로 미뤄 두었습니다.</a:t>
+              <a:t>출발점은 TIER IV의 Autoware Diffusion Planner입니다. DiT 3블록, hidden 192, DPM-Solver++ 10스텝으로 A6000에서 0.05초입니다. 가장 큰 차이는 기구학입니다. Diffusion Planner는 네트워크가 실행 가능성을 보장하지 않고 LQR에 맡기지만, Planner D는 제어 변화율을 생성해 스워브 모델로 rollout하므로 후처리가 필요 없습니다. 이웃과의 공동 생성은 Planner D의 2단계로 미뤄 두었습니다.</a:t>
             </a:r>
           </a:p>
         </p:txBody>
@@ -751,7 +751,7 @@
           <a:lstStyle/>
           <a:p>
             <a:r>
-              <a:t>이 표에는 diffusion과 flow matching이 섞여 있고, 거의 모든 행이 스텝 수를 자랑합니다. 스텝 수를 줄이는 길은 적분기, 시작점 당기기, 증류의 셋이고, 증류는 다양성을 대가로 치릅니다. JPPD는 Isaac Sim과 메카넘 실물로 보도 공유 공간을 다뤘지만 코드는 게재 후 공개 예정입니다. GRACE처럼 기울기 없이 MPPI로 guidance를 추정하는 방식은 travplan의 이진 치명 비용과 잘 맞습니다.</a:t>
+              <a:t>이 표에는 diffusion과 flow matching이 섞여 있고, 거의 모든 행이 스텝 수를 내세웁니다. 스텝 수를 줄이는 길은 적분기, 시작점 당기기, 증류의 셋이고, 증류는 다양성을 대가로 치릅니다. JPPD는 Isaac Sim과 메카넘 실물로 보도 공유 공간을 다뤘지만 코드는 게재 후 공개 예정입니다. GRACE처럼 gradient 없이 MPPI로 guidance를 추정하는 방식은 travplan의 이진 치명 비용과 잘 맞습니다.</a:t>
             </a:r>
           </a:p>
         </p:txBody>
@@ -821,7 +821,7 @@
           <a:lstStyle/>
           <a:p>
             <a:r>
-              <a:t>Planner D는 MPPI에 후보를 넣는 구조가 아니라 완결된 시간 인덱스 궤적을 냅니다. Controller는 그 궤적을 시각별로 따라가며 지형과 보행자에 대한 로컬 안전만 맡습니다. 적분 누적 오차는 Controller의 폐루프 추종이 흡수합니다. 생성 Planner의 존재 이유는 여러 모드인데, 교사가 단일 모드라는 구조적 공백이 있다는 점을 강조하고 싶습니다. 여러 궤적을 한 배치로 미는 MPOT를 오프라인 오라클로 쓰는 것이 그 자리의 후보입니다.</a:t>
+              <a:t>Planner D는 MPPI에 후보를 넣는 구조가 아니라 완결된 시간 인덱스 궤적을 냅니다. Controller는 그 궤적을 시각별로 따라가며 지형과 보행자에 대한 로컬 안전만 맡습니다. 적분 누적 오차는 Controller의 폐루프 추종이 흡수합니다. 생성 Planner의 존재 이유는 여러 모드인데, 교사가 단일 모드라는 구조적 공백이 있다는 점을 강조하고 싶습니다. 여러 궤적을 한 배치로 최적화하는 MPOT를 오프라인 오라클로 쓰는 것이 그 자리의 후보입니다.</a:t>
             </a:r>
           </a:p>
         </p:txBody>
@@ -891,7 +891,7 @@
           <a:lstStyle/>
           <a:p>
             <a:r>
-              <a:t>2024년부터 시각 내비 기반 모델은 VLA와 웹 영상 학습의 두 방향으로 커졌습니다. 그러나 2026년 실제 환경 평가는 이 모델들의 기하 이해가 아직 약하다는 것을 보였습니다. 이 절에서는 층을 나눠 성공한 VAMOS, 늦은 답을 다루는 Slow Brain, 그리고 보도 로봇의 시연 질을 고치는 연구들을 봅니다.</a:t>
+              <a:t>2024년부터 내비게이션용 비전 파운데이션 모델은 VLA와 웹 영상 학습의 두 방향으로 커졌습니다. 그러나 2026년의 실제 환경 평가는 이 모델들의 기하 이해가 아직 약하다는 것을 보여 줬습니다. 이 절에서는 층을 나눠 성공한 VAMOS, 늦은 답을 다루는 Slow Brain, 그리고 보도 로봇의 시연 질을 고치는 연구들을 살펴봅니다.</a:t>
             </a:r>
           </a:p>
         </p:txBody>
@@ -961,7 +961,7 @@
           <a:lstStyle/>
           <a:p>
             <a:r>
-              <a:t>VAMOS는 "어디로 갈지"와 "이 로봇이 갈 수 있는지"를 나눴습니다. 아래층 affordance 함수는 Isaac Lab 지형 1,000개에서 정책을 굴린 성공 여부를 라벨로 썼습니다. 한편 Can VFMs Navigate? 논문은 GNM, ViNT, NoMaD 등을 zero-shot으로 평가해 충돌이 잦고 기하 이해가 약하다는 것을 보였습니다. 그래서 VLA는 위층, 기하는 아래층이라는 분담이 수치로 뒷받침됩니다. 다만 VAMOS 코드는 라이선스 표기가 없어 설계만 참고합니다.</a:t>
+              <a:t>VAMOS는 "어디로 갈지"와 "이 로봇이 갈 수 있는지"를 나눴습니다. 아래층 affordance 함수는 Isaac Lab 지형 1,000개에서 정책을 rollout한 성공 여부를 라벨로 썼습니다. 한편 Can VFMs Navigate? 논문은 GNM, ViNT, NoMaD 등을 zero-shot으로 평가해 충돌이 잦고 기하 이해가 약하다는 것을 보여 줬습니다. 그래서 VLA는 위층, 기하는 아래층이라는 분담이 수치로 뒷받침됩니다. 다만 VAMOS 코드는 라이선스 표기가 없어 설계만 참고합니다.</a:t>
             </a:r>
           </a:p>
         </p:txBody>
@@ -1031,7 +1031,7 @@
           <a:lstStyle/>
           <a:p>
             <a:r>
-              <a:t>빠른 학습 Planner가 후보를 내고, 느린 판정자가 고르고, 폴백이 있다는 점에서 travplan의 planner_df와 같은 꼴입니다. 가져올 것은 늦은 신호를 다루는 규칙 세 가지입니다. 시뮬에서는 Score Fusion이 VLM 지연 5초까지 성공률 80% 이상을 지켰고, 그대로 따르기는 4초에서 0에 가까워졌습니다. 100 m당 개입 지표는 travplan TP-0038의 100 m당 실패 지표와 같은 방향입니다.</a:t>
+              <a:t>빠른 학습 Planner가 후보를 내고, 느린 판정자가 고르고, 폴백이 있다는 점에서 travplan의 planner_df와 같은 구조입니다. 가져올 것은 늦은 신호를 다루는 규칙 세 가지입니다. 시뮬에서는 Score Fusion이 VLM 지연 5초까지 성공률 80% 이상을 지켰고, 그대로 따르기는 4초에서 0에 가까워졌습니다. 100 m당 개입 지표는 travplan TP-0038의 100 m당 실패 지표와 같은 방향입니다.</a:t>
             </a:r>
           </a:p>
         </p:txBody>
@@ -1171,7 +1171,7 @@
           <a:lstStyle/>
           <a:p>
             <a:r>
-              <a:t>이 절은 학습 Planner를 키울 때 비교 기준으로 삼거나 기법을 빌려 올 연구입니다. 공통된 흐름은 위험의 단위가 칸에서 방향, Controller의 추종 능력, 차체 자세로 옮겨 가고 있다는 것입니다. 다만 칸 cost와 직접 비교한 연구는 아직 없다는 점도 함께 기억해 주십시오.</a:t>
+              <a:t>이 절은 학습 Planner를 발전시킬 때 비교 기준으로 삼거나 기법을 빌려 올 연구입니다. 공통된 흐름은 위험의 단위가 칸에서 방향, Controller의 추종 능력, 차체 자세로 옮겨 가고 있다는 것입니다. 다만 칸 cost와 직접 비교한 연구는 아직 없다는 점도 함께 기억해 주십시오.</a:t>
             </a:r>
           </a:p>
         </p:txBody>
@@ -1241,7 +1241,7 @@
           <a:lstStyle/>
           <a:p>
             <a:r>
-              <a:t>핵심은 라벨이 "그 Controller가 실제로 따라간 정도"라는 점입니다. plant 레벨 3의 시간 초과는 cost가 낮아도 plant와 mppi_plant_lag가 따라가지 못하는 칸이 있다는 뜻입니다. 다만 travplan의 추종 오차는 Planner가 낸 경로에 따라 달라지므로, 그대로 배우면 라벨이 순환합니다. 그래서 정해진 명령 속도를 따라가는 rollout으로 라벨을 모아야 합니다. 8방향 텐서는 Guidance의 8-연결 격자와 모양이 같습니다.</a:t>
+              <a:t>핵심은 라벨이 "그 Controller가 실제로 따라간 정도"라는 점입니다. plant 레벨 3의 시간 초과는 cost가 낮아도 plant와 mppi_plant_lag가 따라가지 못하는 칸이 있다는 뜻입니다. 다만 travplan의 추종 오차는 Planner가 낸 경로에 따라 달라지므로, 그대로 학습하면 라벨이 순환합니다. 그래서 정해진 명령 속도를 따라가는 rollout으로 라벨을 모아야 합니다. 8방향 텐서는 Guidance의 8-연결 격자와 모양이 같습니다.</a:t>
             </a:r>
           </a:p>
         </p:txBody>
@@ -1381,7 +1381,7 @@
           <a:lstStyle/>
           <a:p>
             <a:r>
-              <a:t>TRG-planner는 처음에 규모 확장의 대안으로 적었다가 2026-10-02에 정정했습니다. 가져올 것은 규모가 아니라 방향 의존성입니다. DreamFlow는 travplan의 알려진 한계인 센서 범위 밖 탐색을 정면으로 다룹니다. Occlusion-Aware 논문은 불확실성 항의 유무만 비교했으므로 칸 σ와 자세 분산 중 무엇이 나은지는 답하지 않습니다. CARE식 밀기는 지금의 Guidance 폴백 앞에 둘 수 있는 판입니다.</a:t>
+              <a:t>TRG-planner는 처음에 규모 확장의 대안으로 적었다가 2026-10-02에 정정했습니다. 가져올 것은 규모가 아니라 방향 의존성입니다. DreamFlow는 travplan의 알려진 한계인 센서 범위 밖 탐색을 정면으로 다룹니다. Occlusion-Aware 논문은 불확실성 항의 유무만 비교했으므로 칸 σ와 자세 분산 중 무엇이 나은지는 답하지 않습니다. CARE식 척력 보정은 지금의 Guidance 폴백 앞에 둘 수 있는 선택지입니다.</a:t>
             </a:r>
           </a:p>
         </p:txBody>
@@ -1451,7 +1451,7 @@
           <a:lstStyle/>
           <a:p>
             <a:r>
-              <a:t>자동차 오픈소스는 규칙 기반 풀스택에서 벤치마크 위의 학습 Planner로, 다시 둘을 섞는 구조로 왔습니다. Autoware는 생성형과 규칙 기반 Planner가 함께 후보를 내고 검증기와 순위기가 고르는 구조를 넣고 있습니다. 상용 스택도 모두 학습 계획 위에 규칙 안전 층을 둡니다.</a:t>
+              <a:t>자동차 오픈소스는 규칙 기반 풀스택에서 벤치마크 위의 학습 Planner로, 다시 둘을 섞는 구조로 왔습니다. Autoware는 생성형과 규칙 기반 Planner가 함께 후보를 내고 검증기와 ranker가 고르는 구조를 도입하고 있습니다. 상용 스택도 모두 학습 계획 위에 규칙 안전 층을 둡니다.</a:t>
             </a:r>
           </a:p>
         </p:txBody>
@@ -1521,7 +1521,7 @@
           <a:lstStyle/>
           <a:p>
             <a:r>
-              <a:t>PDM 논문은 학습 Planner가 장기 예측에는 강하지만 폐루프에서는 오차를 스스로 키운다는 것을 보였습니다. 2초 안 충돌이 예상되면 비상 제동으로 바꾸는 규칙도 있습니다. Planner D도 후보 16개를 만들고 스워브 모델로 굴리고 규칙 점수로 고르니, 다른 곳은 후보 생성뿐입니다. 그래서 "Guidance 경로 + 규칙 속도·오프셋 후보 + 같은 점수기"를 비학습 Planner D로 두면 학습이 실제로 얼마를 더하는지 잴 수 있습니다. Autoware식 검증기로 스워브 한계와 치명 셀을 어기는 후보를 먼저 거르는 것도 가져올 것입니다.</a:t>
+              <a:t>PDM 논문은 학습 Planner가 장기 예측에는 강하지만 폐루프에서는 오차를 스스로 키운다는 것을 보여 줬습니다. 2초 안 충돌이 예상되면 비상 제동으로 바꾸는 규칙도 있습니다. Planner D도 후보 16개를 만들어 스워브 모델로 rollout하고 규칙 점수로 고르니, 다른 점은 후보 생성뿐입니다. 그래서 "Guidance 경로 + 규칙 속도·오프셋 후보 + 같은 점수기"를 비학습 기준선으로 두면 학습이 실제로 얼마나 더하는지 잴 수 있습니다. Autoware식 검증기로 스워브 한계와 치명 셀을 어기는 후보를 먼저 거르는 것도 가져올 것입니다.</a:t>
             </a:r>
           </a:p>
         </p:txBody>
@@ -1591,7 +1591,7 @@
           <a:lstStyle/>
           <a:p>
             <a:r>
-              <a:t>2022–2025년의 네 편은 "학습 Planner가 규칙 Planner를 대체할 수 있는가"에 차례로 답했습니다. 답은 대체했지만 규칙은 다른 자리에 남았다는 것입니다. 자율주행의 지금 관심사도 3DGS와 시뮬 안의 RL 후학습, 폐루프 평가입니다. travplan의 다음 단계도 같은 방향이라, Planner D를 폐루프 RL로 후학습한 TP-0066 결과를 7절에서 봅니다.</a:t>
+              <a:t>2022–2025년의 네 편은 "학습 Planner가 규칙 Planner를 대체할 수 있는가"에 차례로 답했습니다. 답은 대체했지만 규칙은 다른 자리에 남았다는 것입니다. 자율주행의 지금 관심사도 3DGS와 시뮬 안의 RL 후학습, 폐루프 평가입니다. travplan의 다음 단계도 같은 방향이라, Planner D를 폐루프 RL로 후학습한 TP-0066 결과를 7절에서 다룹니다.</a:t>
             </a:r>
           </a:p>
         </p:txBody>
@@ -1661,7 +1661,7 @@
           <a:lstStyle/>
           <a:p>
             <a:r>
-              <a:t>B.17은 2025–2026의 학습 로컬 Planner, 생성형 궤적, 위험 인지 계획 16편을 한 표로 비교한 탭입니다. 거의 모두 "사전학습한 생성 Planner가 후보 여럿을 내고, 다른 무엇이 고르거나 다듬는다"로 수렴했습니다. 이 절에서 비교표, 공통점, 차이점을 보고 travplan이 무엇을 가져올지 정리합니다.</a:t>
+              <a:t>B.17은 2025–2026의 학습 로컬 Planner, 생성형 궤적, 위험 인지 계획 16편을 한 표로 비교한 탭입니다. 거의 모두 "사전학습한 생성 Planner가 후보 여럿을 내고, 다른 무엇이 고르거나 보정한다"로 수렴했습니다. 이 절에서는 비교표, 공통점, 차이점을 살펴보고 travplan이 무엇을 가져올지 정리합니다.</a:t>
             </a:r>
           </a:p>
         </p:txBody>
@@ -1941,7 +1941,7 @@
           <a:lstStyle/>
           <a:p>
             <a:r>
-              <a:t>다섯 축을 카드로 나눴고 마지막 카드는 travplan의 위치입니다. travplan의 TP-0066은 RL 신호 축에서 가장 싼 개루프 채점에 있습니다. 싼 대신 경사로를 지나친 뒤 몇 초짜리 재탐색을 보지 못하고, 이것이 뒤에서 볼 정체의 해석입니다. 표현 축에서는 travplan이 높이 지도, 즉 TravMap 쪽에 서 있고 그 이유가 다음 장의 "가져오지 않을 것"입니다.</a:t>
+              <a:t>다섯 축을 카드로 나눴고 마지막 카드는 travplan의 위치입니다. travplan의 TP-0066은 RL 신호 축에서 가장 싼 개루프 채점에 있습니다. 싼 대신 경사로를 지나친 뒤의 몇 초짜리 재탐색을 보상하지 못하고, 이것이 뒤에서 다룰 정체의 해석입니다. 표현 축에서는 travplan이 높이 지도, 즉 TravMap 쪽에 서 있고 그 이유가 다음 장의 "가져오지 않을 것"입니다.</a:t>
             </a:r>
           </a:p>
         </p:txBody>
@@ -2081,7 +2081,7 @@
           <a:lstStyle/>
           <a:p>
             <a:r>
-              <a:t>2026-09-25부터 Planner와 Controller를 나눴습니다. Planner는 상태, TravMap, 목표를 받아 PlanResult의 path와 times를 내고, 제어 명령은 내지 않습니다. Planner D는 이 세 층 가운데 가운데 층, 즉 학습 생성기입니다. VLA는 이 세 층 위에서 목표를 정하는 층으로 쓰겠다는 것이 문서의 결론이고, 뒤에서 다시 봅니다.</a:t>
+              <a:t>2026-09-25부터 Planner와 Controller를 나눴습니다. Planner는 상태, TravMap, 목표를 받아 PlanResult의 path와 times를 내고, 제어 명령은 내지 않습니다. Planner D는 이 세 층 가운데 중간 층인 학습 생성기입니다. VLA는 이 세 층 위에서 목표를 정하는 층으로 쓰겠다는 것이 문서의 결론이고, 뒤에서 다시 다룹니다.</a:t>
             </a:r>
           </a:p>
         </p:txBody>
@@ -2151,7 +2151,7 @@
           <a:lstStyle/>
           <a:p>
             <a:r>
-              <a:t>각 항목에 TP 후보 문장이 문서에 적혀 있습니다. 1번은 TP-0138 후속으로, 치명과 보행자 충돌 항을 포함하고 twin critic의 최솟값이 필요합니다. 학습 시간은 재지 않았고, X-NavDP의 12시간은 IsaacLab 448개 환경의 값이라 그대로 옮길 수 없습니다. plant 지연을 켜면 같은 후보라도 전이가 달라져 critic을 다시 배워야 할 수 있다는 위험도 있습니다. 지금 Planner 트랙은 쉬고 있습니다.</a:t>
+              <a:t>각 항목의 TP 후보 문장은 문서에 적혀 있습니다. 1번은 TP-0138 후속으로, 치명과 보행자 충돌 항을 포함하고 twin critic의 최솟값이 필요합니다. 학습 시간은 재지 않았고, X-NavDP의 12시간은 IsaacLab 448개 환경의 값이라 그대로 옮길 수 없습니다. plant 지연을 켜면 같은 후보라도 전이가 달라져 critic을 다시 배워야 할 수 있다는 위험도 있습니다. 지금 Planner 트랙은 쉬고 있습니다.</a:t>
             </a:r>
           </a:p>
         </p:txBody>
@@ -2291,7 +2291,7 @@
           <a:lstStyle/>
           <a:p>
             <a:r>
-              <a:t>초기 Planner D는 8/12였고, 실패는 curb_ramp와 bumps_potholes의 시간 초과였습니다. Planner는 요철 띠를 건너는 궤적을 계속 냈지만, MPPI 시간 참조 비용은 스텝별 추종 오차뿐이라 멈춤과 건넘의 비용이 비슷해져 제자리에 머물렀습니다. 경로 모드에 있던 진행 항을 시간 모드에도 대칭으로 넣자 12/12가 됐습니다. 직전 계획 유지(keep_previous)도 매 스텝 재선택으로 참조가 흔들리는 문제를 줄였습니다. planner_d+tracker 6/12는 Controller 보정 없는 Planner 자체 품질을 보여 줍니다.</a:t>
+              <a:t>초기 Planner D는 8/12였고, 실패는 curb_ramp와 bumps_potholes의 시간 초과였습니다. Planner는 요철 구간을 건너는 궤적을 계속 냈지만, MPPI 시간 참조 비용은 스텝별 추종 오차뿐이라 멈춤과 건넘의 비용이 비슷해져 제자리에 머물렀습니다. 경로 모드에 있던 진행 항을 시간 모드에도 대칭으로 넣자 12/12가 됐습니다. 직전 계획 유지(keep_previous)도 매 스텝 재선택으로 참조가 흔들리는 문제를 줄였습니다. planner_d+tracker 6/12는 Controller 보정 없는 Planner 자체 품질을 보여 줍니다.</a:t>
             </a:r>
           </a:p>
         </p:txBody>
@@ -2361,7 +2361,7 @@
           <a:lstStyle/>
           <a:p>
             <a:r>
-              <a:t>Planner D를 float16으로 내보내 Playground에서 돌렸고, 같은 속도망을 DDPM 조상 샘플링으로도 샘플합니다. 학습된 망은 1스텝에서 -x를 95–99%만 갚아서 표본 표준편차 0.17이 남고, 출력이 변화율이라 twist와 자세로 두 번 적분돼 끝점이 약 1 m 흩어집니다. 2–4스텝에서는 표본이 평균 쪽으로 오그라들고 10–20스텝에서 퍼짐이 돌아옵니다. 도달이 모두 12/12인 것은 선택기와 MPPI가 받쳐 주기 때문이라, 이 지형에서는 다양성 차이가 도달로 드러나지 않습니다.</a:t>
+              <a:t>Planner D를 float16으로 내보내 Playground에서 돌렸고, 같은 velocity 네트워크를 DDPM ancestral 샘플링으로도 샘플링합니다. 학습된 네트워크는 1스텝에서 -x를 95–99%만 상쇄해서 샘플 표준편차 0.17이 남고, 출력이 변화율이라 twist와 자세로 두 번 적분돼 끝점이 약 1 m 흩어집니다. 2–4스텝에서는 샘플이 평균 쪽으로 수축하고 10–20스텝에서 퍼짐이 돌아옵니다. 도달이 모두 12/12인 것은 선택기와 MPPI가 받쳐 주기 때문이라, 이 지형에서는 다양성 차이가 도달로 드러나지 않습니다.</a:t>
             </a:r>
           </a:p>
         </p:txBody>
@@ -2431,7 +2431,7 @@
           <a:lstStyle/>
           <a:p>
             <a:r>
-              <a:t>후보가 이기면 계획이 Guidance 경로 자체가 되고, MPPI는 경로 모드로 따릅니다. 첫 설계는 Guidance를 pure pursuit로 굴린 시간 인덱스 궤적이었는데 실패했습니다. 레벨 3 경사로의 자유 통로가 한 칸 폭이라 시간 참조 모드로는 꺾어 들지 못한 것으로 보입니다. 트리거 값 0.9, 3번, 20은 미리 정한 한 벌만 돌렸고 최선인지는 모릅니다. 폴백을 끄면 main과 궤적이 비트 단위로 같습니다.</a:t>
+              <a:t>후보가 이기면 계획이 Guidance 경로 자체가 되고, MPPI는 경로 모드로 따릅니다. 첫 설계는 Guidance 경로를 pure pursuit로 rollout한 시간 인덱스 궤적이었는데 실패했습니다. 레벨 3 경사로의 자유 통로가 한 칸 폭이라 시간 참조 모드로는 진입하지 못한 것으로 보입니다. 트리거 값 0.9, 3번, 20은 미리 정한 한 세트만 돌렸고 최선인지는 모릅니다. 폴백을 끄면 main과 궤적이 비트 단위로 같습니다.</a:t>
             </a:r>
           </a:p>
         </p:txBody>
@@ -2501,7 +2501,7 @@
           <a:lstStyle/>
           <a:p>
             <a:r>
-              <a:t>데스크톱 한 대에서 rollout이 라운드당 208–245초, 미세 조정이 5–6초로 전체 12분이었습니다. RL 단독의 개선은 p = 0.07이라 잡음 바닥 밖이라고 말할 수 없습니다. 대신 폴백과 함께 재면 Guidance 경로에 기대는 계획이 51%에서 42%로 줄고 도달도 7 s 빨라집니다. 지금 가장 좋은 학습 스택은 RL 체크포인트에 폴백을 켠 것이고, 보행자 최소 여유도 0.24 m로 기준 0.2 m를 넘습니다. 학습은 한 번만 돌렸습니다.</a:t>
+              <a:t>데스크톱 한 대에서 rollout이 라운드당 208–245초, fine-tuning이 5–6초로 전체 12분이었습니다. RL 단독의 개선은 p = 0.07이라 잡음 바닥 밖이라고 말할 수 없습니다. 대신 폴백과 함께 재면 Guidance 경로에 기대는 계획이 51%에서 42%로 줄고 도달도 7 s 빨라집니다. 지금 가장 좋은 학습 스택은 RL 체크포인트에 폴백을 켠 것이고, 보행자 최소 여유도 0.24 m로 기준 0.2 m를 넘습니다. 학습은 한 번만 돌렸습니다.</a:t>
             </a:r>
           </a:p>
         </p:txBody>
@@ -2571,7 +2571,7 @@
           <a:lstStyle/>
           <a:p>
             <a:r>
-              <a:t>스윕은 지형마다 한 번씩만 돌렸으므로 스택 사이의 1–3개 차이는 재실행 차이와 구별되지 않습니다. 말할 수 있는 것은 레벨 3까지 급격한 붕괴가 없다는 것뿐입니다. 진단 쪽 결론이 더 쓸모 있습니다. 치명 표본 비율이 높으면 실패한다는 TP-0050의 관계가 네 지형과 네 레벨 모두에서 유지되고, 이것이 폴백 트리거의 근거입니다. random_mix s3는 belief 잡음이 한 칸 폭 통로를 닫는 결정적 실패입니다.</a:t>
+              <a:t>스윕은 지형마다 한 번씩만 돌렸으므로 스택 사이의 1–3개 차이는 재실행 차이와 구별되지 않습니다. 말할 수 있는 것은 레벨 3까지 급격한 붕괴가 없다는 것뿐입니다. 진단 쪽 결론이 더 쓸모 있습니다. 치명 샘플 비율이 높으면 실패한다는 TP-0050의 관계가 네 지형과 네 레벨 모두에서 유지되고, 이것이 폴백 트리거의 근거입니다. random_mix s3는 belief 잡음이 한 칸 폭 통로를 닫는 결정적 실패입니다.</a:t>
             </a:r>
           </a:p>
         </p:txBody>
@@ -2641,7 +2641,7 @@
           <a:lstStyle/>
           <a:p>
             <a:r>
-              <a:t>2단계는 curb_ramp 레벨 3만으로 학습해 벤치마크가 24/24에서 22/24로 떨어졌고, 보행자 최소 여유도 0.11 m까지 줄었습니다. 리셋 DAgger는 경사로를 지나친 상태에서 시작해 재탐색 상태에 전문가 이름표를 붙였지만, 둘 다 23/30으로 잡음 안이었습니다. 표본을 64개로 늘려도 24/30이고, 생성 중 cost 안내는 3/30으로 무너졌습니다. 관측을 넓히거나 지평을 늘리면 시연 수집부터 처음부터 다시 학습해야 하므로, 비평가 재시도 규칙에 따라 여기서 멈췄습니다.</a:t>
+              <a:t>2단계는 curb_ramp 레벨 3만으로 학습해 벤치마크가 24/24에서 22/24로 떨어졌고, 보행자 최소 여유도 0.11 m까지 줄었습니다. 리셋 DAgger는 경사로를 지나친 상태에서 시작해 재탐색 상태에 전문가 라벨을 붙였지만, 둘 다 23/30으로 잡음 안이었습니다. 샘플을 64개로 늘려도 24/30이고, 생성 중 cost guidance는 3/30으로 무너졌습니다. 관측을 넓히거나 horizon을 늘리면 시연 수집부터 다시 해야 하므로, 비평가 에이전트의 재시도 규칙에 따라 여기서 멈췄습니다.</a:t>
             </a:r>
           </a:p>
         </p:txBody>
@@ -2711,7 +2711,7 @@
           <a:lstStyle/>
           <a:p>
             <a:r>
-              <a:t>세 줄로 정리하면 이렇습니다. 첫째, 2025–2026 연구는 후보 생성과 선택을 나누는 쪽으로 모였고 travplan 구조도 같습니다. 둘째, Planner D는 레벨 0에서 기준선과 같고 폴백과 RL을 더하면 레벨 3 경사로도 넘지만, 학습만으로는 26/30에서 멈췄습니다. 셋째, 다시 열 때의 첫 수는 Q critic이며, 지금은 L1 인식과 보행자가 먼저입니다.</a:t>
+              <a:t>세 줄로 정리하면 이렇습니다. 첫째, 2025–2026 연구는 후보 생성과 선택을 나누는 쪽으로 모였고 travplan 구조도 같습니다. 둘째, Planner D는 레벨 0에서 기준선과 같고 폴백과 RL을 더하면 레벨 3 경사로도 넘지만, 학습만으로는 26/30에서 멈췄습니다. 셋째, 다시 열 때의 첫 시도는 Q critic이며, 지금은 L1 인식과 보행자가 먼저입니다.</a:t>
             </a:r>
           </a:p>
         </p:txBody>
@@ -2851,7 +2851,7 @@
           <a:lstStyle/>
           <a:p>
             <a:r>
-              <a:t>고전 계획은 전역 경로, 로컬 속도 선택, 궤적 최적화의 세 층입니다. travplan의 GuidancePlanner는 이 중 Dijkstra 하나지만 쓰임이 셋입니다. 비교 기준선이고, Planner D가 받는 subgoal과 cost-to-go의 출처이며, 뒤에서 볼 폴백 후보입니다. Nav2의 전역 계획기와 MPPI Controller 조합이 travplan의 Guidance와 MPPIController 조합과 같은 구조라 나중에 ROS 2로 섞을 때도 경계가 분명합니다.</a:t>
+              <a:t>고전 계획은 전역 경로, 로컬 속도 선택, 궤적 최적화의 세 층입니다. travplan의 GuidancePlanner는 이 중 Dijkstra 하나뿐이지만 쓰임은 셋입니다. 비교 기준선이고, Planner D가 받는 subgoal과 cost-to-go의 출처이며, 뒤에서 다룰 폴백 후보입니다. Nav2의 전역 계획기와 MPPI Controller 조합이 travplan의 Guidance와 MPPIController 조합과 같은 구조라 나중에 ROS 2로 통합할 때도 경계가 분명합니다.</a:t>
             </a:r>
           </a:p>
         </p:txBody>
@@ -2991,7 +2991,7 @@
           <a:lstStyle/>
           <a:p>
             <a:r>
-              <a:t>학습 로컬 Planner는 로봇 주변만 보고 가까운 경로를 내는 학습 모듈입니다. 이 절에서는 세 단계를 봅니다. 비용 지도로 직접 배우는 iPlanner 계열, 후보를 생성하고 critic이 고르는 NavDP, 그리고 그것을 폐루프 RL로 다듬은 X-NavDP입니다.</a:t>
+              <a:t>학습 로컬 Planner는 로봇 주변만 보고 가까운 경로를 내는 학습 모듈입니다. 이 절에서는 세 단계를 살펴봅니다. costmap으로 직접 배우는 iPlanner 계열, 후보를 생성하고 critic이 고르는 NavDP, 그리고 그것을 폐루프 RL로 fine-tuning한 X-NavDP입니다.</a:t>
             </a:r>
           </a:p>
         </p:txBody>
@@ -3061,7 +3061,7 @@
           <a:lstStyle/>
           <a:p>
             <a:r>
-              <a:t>ETH RSL이 명령형 학습이라 부른 방식입니다. 예측한 경로 점에서 비용 지도를 쌍선형으로 읽으면 미분이 가능해서, 비용의 기울기가 네트워크까지 흐릅니다. travplan의 LearnedPlanner, 즉 Planner B가 이 계열이고 plan_loss는 평균 비용, 치명 영역 벌점, σ, 목표 거리, 매끄러움, 길이의 여섯 항입니다. 답이 하나라서 8/12에 머물렀고, 그래서 개발의 무게가 생성형인 Planner D로 옮겨 갔습니다.</a:t>
+              <a:t>ETH RSL이 imperative learning이라 부른 방식입니다. 예측한 경로 점에서 costmap을 bilinear 보간으로 읽으면 미분이 가능해서, 비용의 gradient가 네트워크까지 흐릅니다. travplan의 LearnedPlanner, 즉 Planner B가 이 계열이고 plan_loss는 평균 비용, 치명 영역 페널티, σ, 목표 거리, 매끄러움, 길이의 여섯 항입니다. 답이 하나라서 8/12에 머물렀고, 그래서 개발의 무게가 생성형인 Planner D로 옮겨 갔습니다.</a:t>
             </a:r>
           </a:p>
         </p:txBody>
@@ -3201,7 +3201,7 @@
           <a:lstStyle/>
           <a:p>
             <a:r>
-              <a:t>확산 정책은 우도를 계산하기 어려워 DPPO 계열 정책 기울기가 불안정합니다. 절제에서도 DPPO는 모방만 한 모델보다 낮았습니다. 비교 대상으로 같은 NavDP에서 출발한 Beyond Imitation은 에피소드 보상 GRPO로 0.520에서 0.587로 올렸고, ReinFlow는 flow 정책에 학습 잡음을 넣어 정확한 가능도를 얻습니다. Planner D는 flow matching이라 Q critic으로 다단계 보상을 만들고 ReinFlow식 기울기를 쓰는 조합이 가장 가깝습니다. 위험은 후보 16개에서의 Q 과대평가와 plant마다 critic을 다시 배워야 할 가능성입니다.</a:t>
+              <a:t>diffusion 정책은 likelihood를 계산하기 어려워 DPPO 계열 policy gradient가 불안정합니다. ablation에서도 DPPO는 모방만 한 모델보다 낮았습니다. 비교 대상으로 같은 NavDP에서 출발한 Beyond Imitation은 에피소드 보상 GRPO로 0.520에서 0.587로 올렸고, ReinFlow는 flow 정책에 학습 잡음을 넣어 정확한 likelihood를 얻습니다. Planner D는 flow matching이라 Q critic으로 다단계 보상을 만들고 ReinFlow식 gradient를 쓰는 조합이 가장 가깝습니다. 위험은 후보 16개에서의 Q 과대평가와 plant마다 critic을 다시 학습해야 할 가능성입니다.</a:t>
             </a:r>
           </a:p>
         </p:txBody>
@@ -6832,7 +6832,7 @@
         </p:nvGraphicFramePr>
         <p:xfrm>
           <a:off x="711200" y="1361678"/>
-          <a:ext cx="5257801" cy="2049701"/>
+          <a:ext cx="5257799" cy="2049701"/>
         </p:xfrm>
         <a:graphic>
           <a:graphicData uri="http://schemas.openxmlformats.org/drawingml/2006/table">
@@ -6841,9 +6841,9 @@
                 <a:tableStyleId>{5C22544A-7EE6-4342-B048-85BDC9FD1C3A}</a:tableStyleId>
               </a:tblPr>
               <a:tblGrid>
-                <a:gridCol w="611287"/>
-                <a:gridCol w="1479352"/>
-                <a:gridCol w="3167162"/>
+                <a:gridCol w="556220"/>
+                <a:gridCol w="1346299"/>
+                <a:gridCol w="3355280"/>
               </a:tblGrid>
               <a:tr h="263634">
                 <a:tc>
@@ -6982,7 +6982,7 @@
                           <a:ea typeface="Malgun Gothic"/>
                           <a:cs typeface="Malgun Gothic"/>
                         </a:rPr>
-                        <a:t>궤적 전체를 확산으로, 보상 기울기 guidance</a:t>
+                        <a:t>궤적 전체를 diffusion으로, 보상 gradient guidance</a:t>
                       </a:r>
                     </a:p>
                   </a:txBody>
@@ -7056,7 +7056,7 @@
                           <a:ea typeface="Malgun Gothic"/>
                           <a:cs typeface="Malgun Gothic"/>
                         </a:rPr>
-                        <a:t>관측 조건 행동 열, receding horizon</a:t>
+                        <a:t>관측 조건부 행동 시퀀스, receding horizon</a:t>
                       </a:r>
                     </a:p>
                   </a:txBody>
@@ -7130,7 +7130,7 @@
                           <a:ea typeface="Malgun Gothic"/>
                           <a:cs typeface="Malgun Gothic"/>
                         </a:rPr>
-                        <a:t>확산 prior × 비용 likelihood 사후 샘플</a:t>
+                        <a:t>diffusion prior × 비용 likelihood 사후 샘플링</a:t>
                       </a:r>
                     </a:p>
                   </a:txBody>
@@ -7918,7 +7918,7 @@
                           <a:ea typeface="Malgun Gothic"/>
                           <a:cs typeface="Malgun Gothic"/>
                         </a:rPr>
-                        <a:t>여러 개를 샘플하고 고른다</a:t>
+                        <a:t>여러 개를 샘플링해 고른다</a:t>
                       </a:r>
                     </a:p>
                   </a:txBody>
@@ -8242,9 +8242,9 @@
                 <a:tableStyleId>{5C22544A-7EE6-4342-B048-85BDC9FD1C3A}</a:tableStyleId>
               </a:tblPr>
               <a:tblGrid>
-                <a:gridCol w="1771352"/>
-                <a:gridCol w="4841280"/>
-                <a:gridCol w="4156968"/>
+                <a:gridCol w="1696343"/>
+                <a:gridCol w="4636294"/>
+                <a:gridCol w="4436963"/>
               </a:tblGrid>
               <a:tr h="263634">
                 <a:tc>
@@ -8516,7 +8516,7 @@
                           <a:ea typeface="Malgun Gothic"/>
                           <a:cs typeface="Malgun Gothic"/>
                         </a:rPr>
-                        <a:t>목적지 비연결</a:t>
+                        <a:t>목적지와의 연결</a:t>
                       </a:r>
                     </a:p>
                   </a:txBody>
@@ -8649,7 +8649,7 @@
                           <a:ea typeface="Malgun Gothic"/>
                           <a:cs typeface="Malgun Gothic"/>
                         </a:rPr>
-                        <a:t>로 굴려 만들 때부터 실행 가능</a:t>
+                        <a:t>로 rollout해 만들 때부터 실행 가능</a:t>
                       </a:r>
                     </a:p>
                   </a:txBody>
@@ -8734,7 +8734,7 @@
                           <a:ea typeface="Malgun Gothic"/>
                           <a:cs typeface="Malgun Gothic"/>
                         </a:rPr>
-                        <a:t>가 TravMap 비용 기울기로</a:t>
+                        <a:t>가 TravMap 비용 gradient로</a:t>
                       </a:r>
                     </a:p>
                   </a:txBody>
@@ -11344,7 +11344,7 @@
                 <a:ea typeface="Malgun Gothic"/>
                 <a:cs typeface="Malgun Gothic"/>
               </a:rPr>
-              <a:t>Planner D는 제어 변화율을 생성해 스워브 모델로 굴린다</a:t>
+              <a:t>Planner D는 제어 변화율을 생성해 스워브 모델로 rollout한다</a:t>
             </a:r>
           </a:p>
         </p:txBody>
@@ -12176,7 +12176,7 @@
                 <a:ea typeface="Malgun Gothic"/>
                 <a:cs typeface="Malgun Gothic"/>
               </a:rPr>
-              <a:t>굴리기</a:t>
+              <a:t>rollout</a:t>
             </a:r>
           </a:p>
         </p:txBody>
@@ -13679,7 +13679,7 @@
                 <a:ea typeface="Malgun Gothic"/>
                 <a:cs typeface="Malgun Gothic"/>
               </a:rPr>
-              <a:t> 다봉 교사(MPOT)가 빈자리다. 아직 착수하지 않았다.</a:t>
+              <a:t> 다중 모드 교사(MPOT)가 빈자리다. 아직 착수하지 않았다.</a:t>
             </a:r>
           </a:p>
         </p:txBody>
@@ -15371,7 +15371,7 @@
                 <a:ea typeface="Malgun Gothic"/>
                 <a:cs typeface="Malgun Gothic"/>
               </a:rPr>
-              <a:t> planner_df와 같은 꼴이다. 판정자가 의미를 본다.</a:t>
+              <a:t> planner_df와 같은 구조다. 판정자가 의미를 본다.</a:t>
             </a:r>
           </a:p>
         </p:txBody>
@@ -15879,7 +15879,7 @@
                 <a:ea typeface="Malgun Gothic"/>
                 <a:cs typeface="Malgun Gothic"/>
               </a:rPr>
-              <a:t>경로점을 흔들고 다시 뽑는 HTL</a:t>
+              <a:t>waypoint를 흔들어 다시 샘플링하는 HTL</a:t>
             </a:r>
           </a:p>
         </p:txBody>
@@ -16223,7 +16223,7 @@
                 <a:ea typeface="Malgun Gothic"/>
                 <a:cs typeface="Malgun Gothic"/>
               </a:rPr>
-              <a:t>배달 함대 로그로 배운다</a:t>
+              <a:t>배달 로봇 fleet 로그로 배운다</a:t>
             </a:r>
           </a:p>
         </p:txBody>
@@ -16346,7 +16346,7 @@
                 <a:ea typeface="Malgun Gothic"/>
                 <a:cs typeface="Malgun Gothic"/>
               </a:rPr>
-              <a:t>지평마다 앵커를 둔다</a:t>
+              <a:t>horizon마다 앵커를 둔다</a:t>
             </a:r>
           </a:p>
         </p:txBody>
@@ -17856,7 +17856,7 @@
                 <a:ea typeface="Malgun Gothic"/>
                 <a:cs typeface="Malgun Gothic"/>
               </a:rPr>
-              <a:t>방법 다섯 갈래를 보고, 비교한 뒤, 우리가 잰 것으로 끝낸다</a:t>
+              <a:t>방법 다섯 갈래를 살펴보고 비교한 뒤, 우리가 잰 것으로 끝낸다</a:t>
             </a:r>
           </a:p>
         </p:txBody>
@@ -21293,7 +21293,7 @@
                 <a:ea typeface="Malgun Gothic"/>
                 <a:cs typeface="Malgun Gothic"/>
               </a:rPr>
-              <a:t> 미는 힘은 생성 뒤 한 번만 건다(생성 중 안내는 3/30).</a:t>
+              <a:t> 척력은 생성이 끝난 뒤 한 번만 적용한다(생성 중 guidance는 3/30).</a:t>
             </a:r>
           </a:p>
         </p:txBody>
@@ -21620,7 +21620,7 @@
         <p:spPr>
           <a:xfrm>
             <a:off x="711200" y="781050"/>
-            <a:ext cx="11118088" cy="554335"/>
+            <a:ext cx="11118088" cy="1057870"/>
           </a:xfrm>
           <a:prstGeom prst="rect">
             <a:avLst/>
@@ -21647,7 +21647,7 @@
                 <a:ea typeface="Malgun Gothic"/>
                 <a:cs typeface="Malgun Gothic"/>
               </a:rPr>
-              <a:t>규칙 후보 15개를 굴려 고른 PDM-Closed가 학습 Planner를 이겼다</a:t>
+              <a:t>규칙 후보 15개를 시뮬레이션해 고른 PDM-Closed가 학습 Planner를 이겼다</a:t>
             </a:r>
           </a:p>
         </p:txBody>
@@ -21660,7 +21660,7 @@
         </p:nvSpPr>
         <p:spPr>
           <a:xfrm>
-            <a:off x="711200" y="1361678"/>
+            <a:off x="711200" y="1764506"/>
             <a:ext cx="10769600" cy="2540000"/>
           </a:xfrm>
           <a:prstGeom prst="roundRect">
@@ -21701,7 +21701,7 @@
         </p:blipFill>
         <p:spPr>
           <a:xfrm>
-            <a:off x="2103967" y="1361678"/>
+            <a:off x="2103967" y="1764506"/>
             <a:ext cx="7984067" cy="2540000"/>
           </a:xfrm>
           <a:prstGeom prst="rect">
@@ -21717,7 +21717,7 @@
         </p:nvSpPr>
         <p:spPr>
           <a:xfrm>
-            <a:off x="711200" y="3965178"/>
+            <a:off x="711200" y="4368006"/>
             <a:ext cx="11118088" cy="273050"/>
           </a:xfrm>
           <a:prstGeom prst="rect">
@@ -21758,7 +21758,7 @@
         </p:nvSpPr>
         <p:spPr>
           <a:xfrm>
-            <a:off x="749300" y="4320778"/>
+            <a:off x="749300" y="4723606"/>
             <a:ext cx="5401691" cy="360362"/>
           </a:xfrm>
           <a:prstGeom prst="rect">
@@ -21812,7 +21812,7 @@
         </p:nvSpPr>
         <p:spPr>
           <a:xfrm>
-            <a:off x="749300" y="4631928"/>
+            <a:off x="749300" y="5034756"/>
             <a:ext cx="5401691" cy="360362"/>
           </a:xfrm>
           <a:prstGeom prst="rect">
@@ -21855,7 +21855,7 @@
         </p:nvSpPr>
         <p:spPr>
           <a:xfrm>
-            <a:off x="6261100" y="4320778"/>
+            <a:off x="6261100" y="4723606"/>
             <a:ext cx="5401691" cy="360362"/>
           </a:xfrm>
           <a:prstGeom prst="rect">
@@ -21898,7 +21898,7 @@
         </p:nvSpPr>
         <p:spPr>
           <a:xfrm>
-            <a:off x="6261100" y="4631928"/>
+            <a:off x="6261100" y="5034756"/>
             <a:ext cx="5401691" cy="360362"/>
           </a:xfrm>
           <a:prstGeom prst="rect">
@@ -21941,7 +21941,7 @@
         </p:nvSpPr>
         <p:spPr>
           <a:xfrm>
-            <a:off x="711200" y="5057378"/>
+            <a:off x="711200" y="5460206"/>
             <a:ext cx="10769600" cy="502543"/>
           </a:xfrm>
           <a:prstGeom prst="roundRect">
@@ -21972,7 +21972,7 @@
         </p:nvSpPr>
         <p:spPr>
           <a:xfrm>
-            <a:off x="889000" y="5184378"/>
+            <a:off x="889000" y="5587206"/>
             <a:ext cx="10751820" cy="361479"/>
           </a:xfrm>
           <a:prstGeom prst="rect">
@@ -22011,7 +22011,7 @@
                 <a:ea typeface="Malgun Gothic"/>
                 <a:cs typeface="Malgun Gothic"/>
               </a:rPr>
-              <a:t> 규칙 후보 판을 두면 학습 생성기의 몫을 잴 수 있다.</a:t>
+              <a:t> 규칙 기반 후보 생성기를 기준선으로 두면 학습 생성기의 기여를 잴 수 있다.</a:t>
             </a:r>
           </a:p>
         </p:txBody>
@@ -23841,7 +23841,7 @@
                 <a:ea typeface="Malgun Gothic"/>
                 <a:cs typeface="Malgun Gothic"/>
               </a:rPr>
-              <a:t>영상 입력 계열은 모방으로 시작해 RL로 다듬는다</a:t>
+              <a:t>영상 입력 계열은 모방으로 시작해 RL로 fine-tuning한다</a:t>
             </a:r>
           </a:p>
         </p:txBody>
@@ -23856,7 +23856,7 @@
         </p:nvGraphicFramePr>
         <p:xfrm>
           <a:off x="711200" y="1361678"/>
-          <a:ext cx="10769600" cy="2305239"/>
+          <a:ext cx="10769601" cy="2305239"/>
         </p:xfrm>
         <a:graphic>
           <a:graphicData uri="http://schemas.openxmlformats.org/drawingml/2006/table">
@@ -23865,11 +23865,11 @@
                 <a:tableStyleId>{5C22544A-7EE6-4342-B048-85BDC9FD1C3A}</a:tableStyleId>
               </a:tblPr>
               <a:tblGrid>
-                <a:gridCol w="2895402"/>
-                <a:gridCol w="1458912"/>
-                <a:gridCol w="2537123"/>
-                <a:gridCol w="1949152"/>
-                <a:gridCol w="1929011"/>
+                <a:gridCol w="2622252"/>
+                <a:gridCol w="1321296"/>
+                <a:gridCol w="2846388"/>
+                <a:gridCol w="2232720"/>
+                <a:gridCol w="1746945"/>
               </a:tblGrid>
               <a:tr h="263634">
                 <a:tc>
@@ -24056,7 +24056,7 @@
                           <a:ea typeface="Malgun Gothic"/>
                           <a:cs typeface="Malgun Gothic"/>
                         </a:rPr>
-                        <a:t>확산 후보 + 특권 critic</a:t>
+                        <a:t>diffusion 후보 + privileged critic</a:t>
                       </a:r>
                     </a:p>
                   </a:txBody>
@@ -24202,7 +24202,7 @@
                           <a:ea typeface="Malgun Gothic"/>
                           <a:cs typeface="Malgun Gothic"/>
                         </a:rPr>
-                        <a:t>폐루프 RL, 3초 전이</a:t>
+                        <a:t>폐루프 RL, 3초 transition</a:t>
                       </a:r>
                     </a:p>
                   </a:txBody>
@@ -24446,7 +24446,7 @@
                           <a:ea typeface="Malgun Gothic"/>
                           <a:cs typeface="Malgun Gothic"/>
                         </a:rPr>
-                        <a:t>정확한 가능도 PG</a:t>
+                        <a:t>정확한 likelihood PG</a:t>
                       </a:r>
                     </a:p>
                   </a:txBody>
@@ -24788,7 +24788,7 @@
                           <a:ea typeface="Malgun Gothic"/>
                           <a:cs typeface="Malgun Gothic"/>
                         </a:rPr>
-                        <a:t>다중 지평 앵커, 교정 확장</a:t>
+                        <a:t>다중 horizon 앵커, 교정 확장</a:t>
                       </a:r>
                     </a:p>
                   </a:txBody>
@@ -24910,7 +24910,7 @@
                           <a:ea typeface="Malgun Gothic"/>
                           <a:cs typeface="Malgun Gothic"/>
                         </a:rPr>
-                        <a:t>행동 라벨 재매김(MBRA)</a:t>
+                        <a:t>행동 재라벨링(MBRA)</a:t>
                       </a:r>
                     </a:p>
                   </a:txBody>
@@ -24934,7 +24934,7 @@
                           <a:ea typeface="Malgun Gothic"/>
                           <a:cs typeface="Malgun Gothic"/>
                         </a:rPr>
-                        <a:t>재라벨 자료 모방</a:t>
+                        <a:t>재라벨 데이터 모방</a:t>
                       </a:r>
                     </a:p>
                   </a:txBody>
@@ -25890,11 +25890,11 @@
                 <a:tableStyleId>{5C22544A-7EE6-4342-B048-85BDC9FD1C3A}</a:tableStyleId>
               </a:tblPr>
               <a:tblGrid>
-                <a:gridCol w="2709366"/>
-                <a:gridCol w="1968996"/>
-                <a:gridCol w="2509738"/>
-                <a:gridCol w="1843484"/>
-                <a:gridCol w="1738015"/>
+                <a:gridCol w="2689324"/>
+                <a:gridCol w="2033885"/>
+                <a:gridCol w="2491184"/>
+                <a:gridCol w="1829891"/>
+                <a:gridCol w="1725315"/>
               </a:tblGrid>
               <a:tr h="263634">
                 <a:tc>
@@ -26179,7 +26179,7 @@
                           <a:ea typeface="Malgun Gothic"/>
                           <a:cs typeface="Malgun Gothic"/>
                         </a:rPr>
-                        <a:t>카메라 4대 + 경로점</a:t>
+                        <a:t>카메라 4대 + waypoint</a:t>
                       </a:r>
                     </a:p>
                   </a:txBody>
@@ -26203,7 +26203,7 @@
                           <a:ea typeface="Malgun Gothic"/>
                           <a:cs typeface="Malgun Gothic"/>
                         </a:rPr>
-                        <a:t>경로점을 영상과 정렬</a:t>
+                        <a:t>waypoint를 영상과 정렬</a:t>
                       </a:r>
                     </a:p>
                   </a:txBody>
@@ -26545,7 +26545,7 @@
                           <a:ea typeface="Malgun Gothic"/>
                           <a:cs typeface="Malgun Gothic"/>
                         </a:rPr>
-                        <a:t>높이 지도 잠재</a:t>
+                        <a:t>높이 지도 latent</a:t>
                       </a:r>
                     </a:p>
                   </a:txBody>
@@ -26813,7 +26813,7 @@
                           <a:ea typeface="Malgun Gothic"/>
                           <a:cs typeface="Malgun Gothic"/>
                         </a:rPr>
-                        <a:t>맞춤 분산 → 자세, CEM</a:t>
+                        <a:t>피팅 분산 → 자세, CEM</a:t>
                       </a:r>
                     </a:p>
                   </a:txBody>
@@ -28353,7 +28353,7 @@
                 <a:ea typeface="Malgun Gothic"/>
                 <a:cs typeface="Malgun Gothic"/>
               </a:rPr>
-              <a:t>2 · 모방으로 시작해 RL로 다듬는다</a:t>
+              <a:t>2 · 모방으로 시작해 RL로 fine-tuning한다</a:t>
             </a:r>
           </a:p>
         </p:txBody>
@@ -28666,7 +28666,7 @@
                 <a:ea typeface="Malgun Gothic"/>
                 <a:cs typeface="Malgun Gothic"/>
               </a:rPr>
-              <a:t>이탈 합성, 라벨 재매김, 경로 잡음</a:t>
+              <a:t>이탈 합성, 재라벨링, 경로 잡음</a:t>
             </a:r>
           </a:p>
         </p:txBody>
@@ -28979,7 +28979,7 @@
                 <a:ea typeface="Malgun Gothic"/>
                 <a:cs typeface="Malgun Gothic"/>
               </a:rPr>
-              <a:t>확산 계열은 표본 수로 같은 일을 한다</a:t>
+              <a:t>diffusion 계열은 샘플 수로 같은 일을 한다</a:t>
             </a:r>
           </a:p>
         </p:txBody>
@@ -29662,7 +29662,7 @@
                 <a:ea typeface="Malgun Gothic"/>
                 <a:cs typeface="Malgun Gothic"/>
               </a:rPr>
-              <a:t>영상은 자료가 싸다</a:t>
+              <a:t>영상은 데이터가 싸다</a:t>
             </a:r>
           </a:p>
         </p:txBody>
@@ -35089,7 +35089,7 @@
                 <a:ea typeface="Malgun Gothic"/>
                 <a:cs typeface="Malgun Gothic"/>
               </a:rPr>
-              <a:t>Planner 트랙을 다시 열면 첫 수는 Q critic RL 후학습이다</a:t>
+              <a:t>Planner 트랙을 다시 열면 첫 시도는 Q critic RL 후학습이다</a:t>
             </a:r>
           </a:p>
         </p:txBody>
@@ -37566,7 +37566,7 @@
                 <a:ea typeface="Malgun Gothic"/>
                 <a:cs typeface="Malgun Gothic"/>
               </a:rPr>
-              <a:t>요철 띠 비용 0.7–0.9, 틈이 없다</a:t>
+              <a:t>요철 구간 비용 0.7–0.9, 틈이 없다</a:t>
             </a:r>
           </a:p>
         </p:txBody>
@@ -37838,7 +37838,7 @@
                 <a:ea typeface="Malgun Gothic"/>
                 <a:cs typeface="Malgun Gothic"/>
               </a:rPr>
-              <a:t>시간 모드에 지평 끝 진행 항을 더했다</a:t>
+              <a:t>시간 모드에 horizon 끝 진행 항을 더했다</a:t>
             </a:r>
           </a:p>
         </p:txBody>
@@ -39535,7 +39535,7 @@
                 <a:ea typeface="Malgun Gothic"/>
                 <a:cs typeface="Malgun Gothic"/>
               </a:rPr>
-              <a:t>표본 90% 치명이 3번 이어지면</a:t>
+              <a:t>치명 샘플 90%가 3번 이어지면</a:t>
             </a:r>
           </a:p>
         </p:txBody>
@@ -39942,7 +39942,7 @@
                 <a:ea typeface="Malgun Gothic"/>
                 <a:cs typeface="Malgun Gothic"/>
               </a:rPr>
-              <a:t> 개선은 Guidance 몫이다. 계획의 51%를 Guidance가 이긴다.</a:t>
+              <a:t> 개선은 Guidance의 기여다. 계획의 51%를 Guidance가 이긴다.</a:t>
             </a:r>
           </a:p>
         </p:txBody>
@@ -40074,10 +40074,10 @@
                 <a:tableStyleId>{5C22544A-7EE6-4342-B048-85BDC9FD1C3A}</a:tableStyleId>
               </a:tblPr>
               <a:tblGrid>
-                <a:gridCol w="2292747"/>
-                <a:gridCol w="721122"/>
-                <a:gridCol w="1509613"/>
-                <a:gridCol w="734318"/>
+                <a:gridCol w="2227461"/>
+                <a:gridCol w="700584"/>
+                <a:gridCol w="1466552"/>
+                <a:gridCol w="863203"/>
               </a:tblGrid>
               <a:tr h="263634">
                 <a:tc>
@@ -40166,7 +40166,7 @@
                           <a:ea typeface="Malgun Gothic"/>
                           <a:cs typeface="Malgun Gothic"/>
                         </a:rPr>
-                        <a:t>폴백 몫</a:t>
+                        <a:t>폴백 비율</a:t>
                       </a:r>
                     </a:p>
                   </a:txBody>
@@ -40850,7 +40850,7 @@
                 <a:ea typeface="Malgun Gothic"/>
                 <a:cs typeface="Malgun Gothic"/>
               </a:rPr>
-              <a:t>GRPO식 이점으로 AWR 가중 flow matching, 모방 λ = 0.5</a:t>
+              <a:t>GRPO식 advantage로 AWR 가중 flow matching, 모방 λ = 0.5</a:t>
             </a:r>
           </a:p>
         </p:txBody>
@@ -41239,7 +41239,7 @@
                 <a:ea typeface="Malgun Gothic"/>
                 <a:cs typeface="Malgun Gothic"/>
               </a:rPr>
-              <a:t>왼쪽: 스택별 레벨 0–3 도달(4 지형 × seed 0–9, 40 중). 오른쪽: Planner D 단독의 에피소드별 평균 치명 표본 비율, 큰 X가 시간 초과 — 출처: scripts/make_evidence_figures.py</a:t>
+              <a:t>왼쪽: 스택별 레벨 0–3 도달(4 지형 × seed 0–9, 40 중). 오른쪽: Planner D 단독의 에피소드별 평균 치명 샘플 비율, 큰 X가 시간 초과 — 출처: scripts/make_evidence_figures.py</a:t>
             </a:r>
           </a:p>
         </p:txBody>
@@ -41508,7 +41508,7 @@
                 <a:ea typeface="Malgun Gothic"/>
                 <a:cs typeface="Malgun Gothic"/>
               </a:rPr>
-              <a:t>치명 표본 비율: 실패 </a:t>
+              <a:t>치명 샘플 비율: 실패 </a:t>
             </a:r>
             <a:r>
               <a:rPr sz="1250" b="1" i="0">
@@ -41728,7 +41728,7 @@
         </p:nvGraphicFramePr>
         <p:xfrm>
           <a:off x="711200" y="1361678"/>
-          <a:ext cx="5257799" cy="2049701"/>
+          <a:ext cx="5257800" cy="2049701"/>
         </p:xfrm>
         <a:graphic>
           <a:graphicData uri="http://schemas.openxmlformats.org/drawingml/2006/table">
@@ -41737,10 +41737,10 @@
                 <a:tableStyleId>{5C22544A-7EE6-4342-B048-85BDC9FD1C3A}</a:tableStyleId>
               </a:tblPr>
               <a:tblGrid>
-                <a:gridCol w="2654498"/>
-                <a:gridCol w="858738"/>
-                <a:gridCol w="858738"/>
-                <a:gridCol w="885825"/>
+                <a:gridCol w="2566491"/>
+                <a:gridCol w="828576"/>
+                <a:gridCol w="828576"/>
+                <a:gridCol w="1034157"/>
               </a:tblGrid>
               <a:tr h="263634">
                 <a:tc>
@@ -41829,7 +41829,7 @@
                           <a:ea typeface="Malgun Gothic"/>
                           <a:cs typeface="Malgun Gothic"/>
                         </a:rPr>
-                        <a:t>폴백 몫</a:t>
+                        <a:t>폴백 비율</a:t>
                       </a:r>
                     </a:p>
                   </a:txBody>
@@ -42345,7 +42345,7 @@
                           <a:ea typeface="Malgun Gothic"/>
                           <a:cs typeface="Malgun Gothic"/>
                         </a:rPr>
-                        <a:t>진단: 표본 64개</a:t>
+                        <a:t>진단: 샘플 64개</a:t>
                       </a:r>
                     </a:p>
                   </a:txBody>
@@ -42443,7 +42443,7 @@
                           <a:ea typeface="Malgun Gothic"/>
                           <a:cs typeface="Malgun Gothic"/>
                         </a:rPr>
-                        <a:t>진단: cost 안내 샘플링</a:t>
+                        <a:t>진단: cost guidance 샘플링</a:t>
                       </a:r>
                     </a:p>
                   </a:txBody>
@@ -43069,7 +43069,7 @@
                 <a:ea typeface="Malgun Gothic"/>
                 <a:cs typeface="Malgun Gothic"/>
               </a:rPr>
-              <a:t>관측 ±3.2 m, subgoal 3 m, 지평 4 s</a:t>
+              <a:t>관측 ±3.2 m, subgoal 3 m, horizon 4 s</a:t>
             </a:r>
           </a:p>
         </p:txBody>
@@ -43193,7 +43193,7 @@
                 <a:ea typeface="Malgun Gothic"/>
                 <a:cs typeface="Malgun Gothic"/>
               </a:rPr>
-              <a:t> 데이터와 표본 수는 병목이 아니다. 여기서 멈췄다.</a:t>
+              <a:t> 데이터와 샘플 수는 병목이 아니다. 여기서 멈췄다.</a:t>
             </a:r>
           </a:p>
         </p:txBody>
@@ -43645,7 +43645,7 @@
                 <a:ea typeface="Malgun Gothic"/>
                 <a:cs typeface="Malgun Gothic"/>
               </a:rPr>
-              <a:t>모두 이 꼴로 모였다</a:t>
+              <a:t>모두 이 구조로 수렴했다</a:t>
             </a:r>
           </a:p>
         </p:txBody>
@@ -44374,7 +44374,7 @@
                 <a:ea typeface="Malgun Gothic"/>
                 <a:cs typeface="Malgun Gothic"/>
               </a:rPr>
-              <a:t>0 초기화 잔차, 다봉 교사</a:t>
+              <a:t>0 초기화 잔차, 다중 모드 교사</a:t>
             </a:r>
           </a:p>
         </p:txBody>
@@ -45624,10 +45624,10 @@
                 <a:tableStyleId>{5C22544A-7EE6-4342-B048-85BDC9FD1C3A}</a:tableStyleId>
               </a:tblPr>
               <a:tblGrid>
-                <a:gridCol w="1176834"/>
-                <a:gridCol w="1179711"/>
-                <a:gridCol w="552450"/>
-                <a:gridCol w="2348805"/>
+                <a:gridCol w="1028303"/>
+                <a:gridCol w="1030883"/>
+                <a:gridCol w="482699"/>
+                <a:gridCol w="2715915"/>
               </a:tblGrid>
               <a:tr h="263634">
                 <a:tc>
@@ -45912,7 +45912,7 @@
                           <a:ea typeface="Malgun Gothic"/>
                           <a:cs typeface="Malgun Gothic"/>
                         </a:rPr>
-                        <a:t>남은 비용 추정으로 탐색 순서</a:t>
+                        <a:t>남은 비용 추정(heuristic)으로 탐색 순서</a:t>
                       </a:r>
                     </a:p>
                   </a:txBody>
@@ -46010,7 +46010,7 @@
                           <a:ea typeface="Malgun Gothic"/>
                           <a:cs typeface="Malgun Gothic"/>
                         </a:rPr>
-                        <a:t>가속 한계 안 속도 창에서 고름</a:t>
+                        <a:t>가속 한계 안의 속도 창에서 선택</a:t>
                       </a:r>
                     </a:p>
                   </a:txBody>
@@ -47849,7 +47849,7 @@
                 <a:ea typeface="Malgun Gothic"/>
                 <a:cs typeface="Malgun Gothic"/>
               </a:rPr>
-              <a:t>B.4b · 비용 지도 자기지도</a:t>
+              <a:t>B.4b · costmap 자기지도</a:t>
             </a:r>
           </a:p>
         </p:txBody>
@@ -47890,7 +47890,7 @@
                 <a:ea typeface="Malgun Gothic"/>
                 <a:cs typeface="Malgun Gothic"/>
               </a:rPr>
-              <a:t>라벨 없이 비용 지도의 기울기만으로 경로를 배울 수 있다</a:t>
+              <a:t>라벨 없이 costmap의 gradient만으로 경로를 배울 수 있다</a:t>
             </a:r>
           </a:p>
         </p:txBody>
@@ -48250,7 +48250,7 @@
                 <a:ea typeface="Malgun Gothic"/>
                 <a:cs typeface="Malgun Gothic"/>
               </a:rPr>
-              <a:t>ESDF 비용을 손실로 쓰는 이층 최적화</a:t>
+              <a:t>ESDF 비용을 손실로 쓰는 bilevel 최적화</a:t>
             </a:r>
           </a:p>
         </p:txBody>
@@ -49169,7 +49169,7 @@
         <p:spPr>
           <a:xfrm>
             <a:off x="711200" y="781050"/>
-            <a:ext cx="11118088" cy="554335"/>
+            <a:ext cx="11118088" cy="1057870"/>
           </a:xfrm>
           <a:prstGeom prst="rect">
             <a:avLst/>
@@ -49196,7 +49196,7 @@
                 <a:ea typeface="Malgun Gothic"/>
                 <a:cs typeface="Malgun Gothic"/>
               </a:rPr>
-              <a:t>NavDP는 확산으로 후보를 내고, 특권 정보로 배운 critic이 고른다</a:t>
+              <a:t>NavDP는 diffusion으로 후보를 내고, privileged 정보로 배운 critic이 고른다</a:t>
             </a:r>
           </a:p>
         </p:txBody>
@@ -49209,7 +49209,7 @@
         </p:nvSpPr>
         <p:spPr>
           <a:xfrm>
-            <a:off x="749300" y="1361678"/>
+            <a:off x="749300" y="1764506"/>
             <a:ext cx="5401691" cy="360362"/>
           </a:xfrm>
           <a:prstGeom prst="rect">
@@ -49252,7 +49252,7 @@
         </p:nvSpPr>
         <p:spPr>
           <a:xfrm>
-            <a:off x="749300" y="1672828"/>
+            <a:off x="749300" y="2075656"/>
             <a:ext cx="5401691" cy="360362"/>
           </a:xfrm>
           <a:prstGeom prst="rect">
@@ -49317,7 +49317,7 @@
         </p:nvSpPr>
         <p:spPr>
           <a:xfrm>
-            <a:off x="749300" y="1983978"/>
+            <a:off x="749300" y="2386806"/>
             <a:ext cx="5401691" cy="360362"/>
           </a:xfrm>
           <a:prstGeom prst="rect">
@@ -49360,7 +49360,7 @@
         </p:nvSpPr>
         <p:spPr>
           <a:xfrm>
-            <a:off x="749300" y="2295128"/>
+            <a:off x="749300" y="2697956"/>
             <a:ext cx="5401691" cy="360362"/>
           </a:xfrm>
           <a:prstGeom prst="rect">
@@ -49404,7 +49404,7 @@
           <p:nvPr/>
         </p:nvGraphicFramePr>
         <p:xfrm>
-          <a:off x="711200" y="2657078"/>
+          <a:off x="711200" y="3059906"/>
           <a:ext cx="5257800" cy="1027549"/>
         </p:xfrm>
         <a:graphic>
@@ -49629,7 +49629,7 @@
         </p:nvSpPr>
         <p:spPr>
           <a:xfrm>
-            <a:off x="6223000" y="1361678"/>
+            <a:off x="6223000" y="1764506"/>
             <a:ext cx="5257800" cy="3429000"/>
           </a:xfrm>
           <a:prstGeom prst="roundRect">
@@ -49670,7 +49670,7 @@
         </p:blipFill>
         <p:spPr>
           <a:xfrm>
-            <a:off x="6292945" y="1361678"/>
+            <a:off x="6292945" y="1764506"/>
             <a:ext cx="5117910" cy="3429000"/>
           </a:xfrm>
           <a:prstGeom prst="rect">
@@ -49686,7 +49686,7 @@
         </p:nvSpPr>
         <p:spPr>
           <a:xfrm>
-            <a:off x="6223000" y="4854178"/>
+            <a:off x="6223000" y="5257006"/>
             <a:ext cx="5440934" cy="273050"/>
           </a:xfrm>
           <a:prstGeom prst="rect">
@@ -49727,7 +49727,7 @@
         </p:nvSpPr>
         <p:spPr>
           <a:xfrm>
-            <a:off x="711200" y="5209778"/>
+            <a:off x="711200" y="5612606"/>
             <a:ext cx="10769600" cy="502543"/>
           </a:xfrm>
           <a:prstGeom prst="roundRect">
@@ -49758,7 +49758,7 @@
         </p:nvSpPr>
         <p:spPr>
           <a:xfrm>
-            <a:off x="889000" y="5336778"/>
+            <a:off x="889000" y="5739606"/>
             <a:ext cx="10751820" cy="361479"/>
           </a:xfrm>
           <a:prstGeom prst="rect">
@@ -50153,7 +50153,7 @@
                 <a:ea typeface="Malgun Gothic"/>
                 <a:cs typeface="Malgun Gothic"/>
               </a:rPr>
-              <a:t>3초 추종 구간이 RL 전이 하나</a:t>
+              <a:t>3초 추종 구간이 RL transition 하나</a:t>
             </a:r>
           </a:p>
         </p:txBody>
@@ -50196,7 +50196,7 @@
                 <a:ea typeface="Malgun Gothic"/>
                 <a:cs typeface="Malgun Gothic"/>
               </a:rPr>
-              <a:t>23점 중 9점은 그룹 정규화 몫</a:t>
+              <a:t>23점 중 9점은 그룹 정규화 덕분</a:t>
             </a:r>
           </a:p>
         </p:txBody>
@@ -50220,8 +50220,8 @@
                 <a:tableStyleId>{5C22544A-7EE6-4342-B048-85BDC9FD1C3A}</a:tableStyleId>
               </a:tblPr>
               <a:tblGrid>
-                <a:gridCol w="3016845"/>
-                <a:gridCol w="2240955"/>
+                <a:gridCol w="3181648"/>
+                <a:gridCol w="2076152"/>
               </a:tblGrid>
               <a:tr h="263634">
                 <a:tc>
@@ -50438,7 +50438,7 @@
                           <a:ea typeface="Malgun Gothic"/>
                           <a:cs typeface="Malgun Gothic"/>
                         </a:rPr>
-                        <a:t>절제: DPPO · 모방만</a:t>
+                        <a:t>ablation: DPPO · 모방만</a:t>
                       </a:r>
                     </a:p>
                   </a:txBody>
